--- a/dist/초5/수학/도형과측정/초5_수학_도형과측정_05_다각형의둘레_학생용.pptx
+++ b/dist/초5/수학/도형과측정/초5_수학_도형과측정_05_다각형의둘레_학생용.pptx
@@ -119,13 +119,13 @@
   <p:extLst>
     <p:ext uri="{521415D9-36F7-43E2-AB2F-B90AF26B5E84}">
       <p14:sectionLst xmlns:p14="http://schemas.microsoft.com/office/powerpoint/2010/main">
-        <p14:section name="도입" id="{33dd8497-1de2-0f9e-6cc7-268890ed0a99}">
+        <p14:section name="도입" id="{1eefb507-49ef-e46e-d82a-fca2583d73ee}">
           <p14:sldIdLst>
             <p14:sldId id="256"/>
             <p14:sldId id="257"/>
           </p14:sldIdLst>
         </p14:section>
-        <p14:section name="개념" id="{a4efb3f1-f69c-bf51-d8f6-182ad49f4c3f}">
+        <p14:section name="개념" id="{6467ea7b-c31a-19f9-fffe-b1bdc2332e82}">
           <p14:sldIdLst>
             <p14:sldId id="258"/>
             <p14:sldId id="259"/>
@@ -133,31 +133,31 @@
             <p14:sldId id="262"/>
           </p14:sldIdLst>
         </p14:section>
-        <p14:section name="연습" id="{15e00ca7-176a-0cea-820c-83a636f48d95}">
+        <p14:section name="연습" id="{d0935f6e-4008-ebaf-2a03-ecf408f840a2}">
           <p14:sldIdLst>
             <p14:sldId id="260"/>
             <p14:sldId id="263"/>
             <p14:sldId id="264"/>
           </p14:sldIdLst>
         </p14:section>
-        <p14:section name="개념" id="{bff5e3f0-d9aa-2ff6-3067-808b1af353e2}">
+        <p14:section name="개념" id="{bc6cabd1-cbcc-fa62-9529-372bcb83f501}">
           <p14:sldIdLst/>
         </p14:section>
-        <p14:section name="연습" id="{f097b86d-d288-90f0-44f1-5ed9ab3f9373}">
+        <p14:section name="연습" id="{70f976c2-b8b0-adfe-aa3a-39d9ccfbc0ec}">
           <p14:sldIdLst/>
         </p14:section>
-        <p14:section name="확인" id="{5b6cd5b9-3482-43b9-ab65-c59c820eaab1}">
+        <p14:section name="확인" id="{8fc080d1-883c-a662-24d7-4081a3b5209e}">
           <p14:sldIdLst>
             <p14:sldId id="265"/>
             <p14:sldId id="266"/>
           </p14:sldIdLst>
         </p14:section>
-        <p14:section name="정리" id="{940e78cc-311e-d3a3-0b73-9ff5e90a852e}">
+        <p14:section name="정리" id="{a7f30205-6998-35ae-87e6-44257369140f}">
           <p14:sldIdLst>
             <p14:sldId id="267"/>
           </p14:sldIdLst>
         </p14:section>
-        <p14:section name="보충" id="{ab54c35a-20cb-b012-962d-f11132592536}">
+        <p14:section name="보충" id="{73748b2b-420c-fa1b-0942-5e1a0afb56f0}">
           <p14:sldIdLst>
             <p14:sldId id="268"/>
           </p14:sldIdLst>
@@ -3160,8 +3160,8 @@
         </p:nvSpPr>
         <p:spPr>
           <a:xfrm>
-            <a:off x="6654546" y="2774105"/>
-            <a:ext cx="4608576" cy="1995590"/>
+            <a:off x="6778041" y="2827580"/>
+            <a:ext cx="4361586" cy="1888640"/>
           </a:xfrm>
           <a:custGeom>
             <a:avLst/>
@@ -3170,18 +3170,18 @@
             <a:cxnLst/>
             <a:rect l="l" t="t" r="r" b="b"/>
             <a:pathLst>
-              <a:path w="4608576" h="1995590">
+              <a:path w="4361586" h="1888640">
                 <a:moveTo>
-                  <a:pt x="0" y="1995590"/>
+                  <a:pt x="0" y="1888640"/>
                 </a:moveTo>
                 <a:lnTo>
-                  <a:pt x="3456432" y="1995590"/>
+                  <a:pt x="3271190" y="1888640"/>
                 </a:lnTo>
                 <a:lnTo>
-                  <a:pt x="4608576" y="0"/>
+                  <a:pt x="4361586" y="0"/>
                 </a:lnTo>
                 <a:lnTo>
-                  <a:pt x="1152144" y="0"/>
+                  <a:pt x="1090397" y="0"/>
                 </a:lnTo>
                 <a:close/>
               </a:path>
@@ -3206,7 +3206,7 @@
         </p:nvSpPr>
         <p:spPr>
           <a:xfrm flipV="1">
-            <a:off x="8382762" y="4685875"/>
+            <a:off x="8413636" y="4632400"/>
             <a:ext cx="0" cy="167640"/>
           </a:xfrm>
           <a:prstGeom prst="line">
@@ -3229,7 +3229,7 @@
         </p:nvSpPr>
         <p:spPr>
           <a:xfrm>
-            <a:off x="8001000" y="4846530"/>
+            <a:off x="8031874" y="4793055"/>
             <a:ext cx="763524" cy="349250"/>
           </a:xfrm>
           <a:prstGeom prst="rect">
@@ -3268,7 +3268,7 @@
         </p:nvSpPr>
         <p:spPr>
           <a:xfrm flipH="1" flipV="1">
-            <a:off x="10594902" y="3763866"/>
+            <a:off x="10502281" y="3763866"/>
             <a:ext cx="145181" cy="83819"/>
           </a:xfrm>
           <a:prstGeom prst="line">
@@ -3291,7 +3291,7 @@
         </p:nvSpPr>
         <p:spPr>
           <a:xfrm flipH="1" flipV="1">
-            <a:off x="10634017" y="3696115"/>
+            <a:off x="10541396" y="3696115"/>
             <a:ext cx="145181" cy="83819"/>
           </a:xfrm>
           <a:prstGeom prst="line">
@@ -3314,7 +3314,7 @@
         </p:nvSpPr>
         <p:spPr>
           <a:xfrm>
-            <a:off x="10710312" y="3831113"/>
+            <a:off x="10617690" y="3831113"/>
             <a:ext cx="763524" cy="349250"/>
           </a:xfrm>
           <a:prstGeom prst="rect">
@@ -3353,7 +3353,7 @@
         </p:nvSpPr>
         <p:spPr>
           <a:xfrm>
-            <a:off x="9534906" y="2690285"/>
+            <a:off x="9504032" y="2743760"/>
             <a:ext cx="0" cy="167640"/>
           </a:xfrm>
           <a:prstGeom prst="line">
@@ -3376,7 +3376,7 @@
         </p:nvSpPr>
         <p:spPr>
           <a:xfrm>
-            <a:off x="7177585" y="3696115"/>
+            <a:off x="7270207" y="3696115"/>
             <a:ext cx="145181" cy="83819"/>
           </a:xfrm>
           <a:prstGeom prst="line">
@@ -3399,7 +3399,7 @@
         </p:nvSpPr>
         <p:spPr>
           <a:xfrm>
-            <a:off x="7138470" y="3763866"/>
+            <a:off x="7231091" y="3763866"/>
             <a:ext cx="145181" cy="83819"/>
           </a:xfrm>
           <a:prstGeom prst="line">
@@ -7341,8 +7341,8 @@
         </p:nvSpPr>
         <p:spPr>
           <a:xfrm>
-            <a:off x="1536192" y="1796126"/>
-            <a:ext cx="1508760" cy="1306647"/>
+            <a:off x="1564048" y="1820250"/>
+            <a:ext cx="1453048" cy="1258397"/>
           </a:xfrm>
           <a:custGeom>
             <a:avLst/>
@@ -7351,15 +7351,15 @@
             <a:cxnLst/>
             <a:rect l="l" t="t" r="r" b="b"/>
             <a:pathLst>
-              <a:path w="1508760" h="1306647">
+              <a:path w="1453048" h="1258397">
                 <a:moveTo>
-                  <a:pt x="0" y="1306647"/>
+                  <a:pt x="0" y="1258397"/>
                 </a:moveTo>
                 <a:lnTo>
-                  <a:pt x="1508760" y="1306647"/>
+                  <a:pt x="1453048" y="1258397"/>
                 </a:lnTo>
                 <a:lnTo>
-                  <a:pt x="754380" y="0"/>
+                  <a:pt x="726524" y="0"/>
                 </a:lnTo>
                 <a:close/>
               </a:path>
@@ -7384,7 +7384,7 @@
         </p:nvSpPr>
         <p:spPr>
           <a:xfrm flipV="1">
-            <a:off x="2290572" y="3018952"/>
+            <a:off x="2290572" y="2994828"/>
             <a:ext cx="0" cy="167640"/>
           </a:xfrm>
           <a:prstGeom prst="line">
@@ -7407,7 +7407,7 @@
         </p:nvSpPr>
         <p:spPr>
           <a:xfrm>
-            <a:off x="1908810" y="3179607"/>
+            <a:off x="1908810" y="3155483"/>
             <a:ext cx="763524" cy="349250"/>
           </a:xfrm>
           <a:prstGeom prst="rect">
@@ -7446,7 +7446,7 @@
         </p:nvSpPr>
         <p:spPr>
           <a:xfrm flipH="1">
-            <a:off x="2595171" y="2407540"/>
+            <a:off x="2581243" y="2407540"/>
             <a:ext cx="145181" cy="83819"/>
           </a:xfrm>
           <a:prstGeom prst="line">
@@ -7469,7 +7469,7 @@
         </p:nvSpPr>
         <p:spPr>
           <a:xfrm>
-            <a:off x="1840791" y="2407540"/>
+            <a:off x="1854720" y="2407540"/>
             <a:ext cx="145181" cy="83819"/>
           </a:xfrm>
           <a:prstGeom prst="line">
@@ -7747,8 +7747,8 @@
         </p:nvSpPr>
         <p:spPr>
           <a:xfrm>
-            <a:off x="8993124" y="1665467"/>
-            <a:ext cx="1810512" cy="1567964"/>
+            <a:off x="9171851" y="1820250"/>
+            <a:ext cx="1453059" cy="1258397"/>
           </a:xfrm>
           <a:custGeom>
             <a:avLst/>
@@ -7757,24 +7757,24 @@
             <a:cxnLst/>
             <a:rect l="l" t="t" r="r" b="b"/>
             <a:pathLst>
-              <a:path w="1810512" h="1567964">
+              <a:path w="1453059" h="1258397">
                 <a:moveTo>
-                  <a:pt x="452628" y="1567964"/>
+                  <a:pt x="363265" y="1258397"/>
                 </a:moveTo>
                 <a:lnTo>
-                  <a:pt x="1357884" y="1567964"/>
+                  <a:pt x="1089794" y="1258397"/>
                 </a:lnTo>
                 <a:lnTo>
-                  <a:pt x="1810512" y="783982"/>
+                  <a:pt x="1453059" y="629199"/>
                 </a:lnTo>
                 <a:lnTo>
-                  <a:pt x="1357884" y="0"/>
+                  <a:pt x="1089794" y="0"/>
                 </a:lnTo>
                 <a:lnTo>
-                  <a:pt x="452628" y="0"/>
+                  <a:pt x="363265" y="0"/>
                 </a:lnTo>
                 <a:lnTo>
-                  <a:pt x="0" y="783982"/>
+                  <a:pt x="0" y="629199"/>
                 </a:lnTo>
                 <a:close/>
               </a:path>
@@ -7799,7 +7799,7 @@
         </p:nvSpPr>
         <p:spPr>
           <a:xfrm flipV="1">
-            <a:off x="9898380" y="3149611"/>
+            <a:off x="9898380" y="2994828"/>
             <a:ext cx="0" cy="167640"/>
           </a:xfrm>
           <a:prstGeom prst="line">
@@ -7822,7 +7822,7 @@
         </p:nvSpPr>
         <p:spPr>
           <a:xfrm>
-            <a:off x="9516618" y="3310266"/>
+            <a:off x="9516618" y="3155483"/>
             <a:ext cx="763524" cy="349250"/>
           </a:xfrm>
           <a:prstGeom prst="rect">
@@ -7861,7 +7861,7 @@
         </p:nvSpPr>
         <p:spPr>
           <a:xfrm flipH="1" flipV="1">
-            <a:off x="10504732" y="2799530"/>
+            <a:off x="10370687" y="2722139"/>
             <a:ext cx="145181" cy="83819"/>
           </a:xfrm>
           <a:prstGeom prst="line">
@@ -7884,7 +7884,7 @@
         </p:nvSpPr>
         <p:spPr>
           <a:xfrm flipH="1">
-            <a:off x="10504732" y="2015548"/>
+            <a:off x="10370687" y="2092940"/>
             <a:ext cx="145181" cy="83819"/>
           </a:xfrm>
           <a:prstGeom prst="line">
@@ -7907,7 +7907,7 @@
         </p:nvSpPr>
         <p:spPr>
           <a:xfrm>
-            <a:off x="9898380" y="1581647"/>
+            <a:off x="9898380" y="1736430"/>
             <a:ext cx="0" cy="167640"/>
           </a:xfrm>
           <a:prstGeom prst="line">
@@ -7930,7 +7930,7 @@
         </p:nvSpPr>
         <p:spPr>
           <a:xfrm>
-            <a:off x="9146848" y="2015548"/>
+            <a:off x="9280893" y="2092940"/>
             <a:ext cx="145181" cy="83819"/>
           </a:xfrm>
           <a:prstGeom prst="line">
@@ -7953,7 +7953,7 @@
         </p:nvSpPr>
         <p:spPr>
           <a:xfrm flipV="1">
-            <a:off x="9146848" y="2799530"/>
+            <a:off x="9280893" y="2722139"/>
             <a:ext cx="145181" cy="83819"/>
           </a:xfrm>
           <a:prstGeom prst="line">
@@ -9932,8 +9932,8 @@
         </p:nvSpPr>
         <p:spPr>
           <a:xfrm>
-            <a:off x="7703820" y="1671955"/>
-            <a:ext cx="2487168" cy="1243584"/>
+            <a:off x="7863393" y="1751741"/>
+            <a:ext cx="2168022" cy="1084011"/>
           </a:xfrm>
           <a:custGeom>
             <a:avLst/>
@@ -9942,18 +9942,18 @@
             <a:cxnLst/>
             <a:rect l="l" t="t" r="r" b="b"/>
             <a:pathLst>
-              <a:path w="2487168" h="1243584">
+              <a:path w="2168022" h="1084011">
                 <a:moveTo>
-                  <a:pt x="0" y="1243584"/>
+                  <a:pt x="0" y="1084011"/>
                 </a:moveTo>
                 <a:lnTo>
-                  <a:pt x="1554480" y="1243584"/>
+                  <a:pt x="1355014" y="1084011"/>
                 </a:lnTo>
                 <a:lnTo>
-                  <a:pt x="2487168" y="0"/>
+                  <a:pt x="2168022" y="0"/>
                 </a:lnTo>
                 <a:lnTo>
-                  <a:pt x="932688" y="0"/>
+                  <a:pt x="813008" y="0"/>
                 </a:lnTo>
                 <a:close/>
               </a:path>
@@ -9978,7 +9978,7 @@
         </p:nvSpPr>
         <p:spPr>
           <a:xfrm flipV="1">
-            <a:off x="8481060" y="2831719"/>
+            <a:off x="8540900" y="2751933"/>
             <a:ext cx="0" cy="167640"/>
           </a:xfrm>
           <a:prstGeom prst="line">
@@ -10001,7 +10001,7 @@
         </p:nvSpPr>
         <p:spPr>
           <a:xfrm>
-            <a:off x="8099298" y="2992374"/>
+            <a:off x="8159138" y="2912588"/>
             <a:ext cx="763524" cy="349250"/>
           </a:xfrm>
           <a:prstGeom prst="rect">
@@ -10040,7 +10040,7 @@
         </p:nvSpPr>
         <p:spPr>
           <a:xfrm flipH="1" flipV="1">
-            <a:off x="9657588" y="2243455"/>
+            <a:off x="9557855" y="2243455"/>
             <a:ext cx="134112" cy="100584"/>
           </a:xfrm>
           <a:prstGeom prst="line">
@@ -10063,7 +10063,7 @@
         </p:nvSpPr>
         <p:spPr>
           <a:xfrm>
-            <a:off x="9413748" y="1588135"/>
+            <a:off x="9353908" y="1667921"/>
             <a:ext cx="0" cy="167640"/>
           </a:xfrm>
           <a:prstGeom prst="line">
@@ -10086,7 +10086,7 @@
         </p:nvSpPr>
         <p:spPr>
           <a:xfrm>
-            <a:off x="8103108" y="2243455"/>
+            <a:off x="8202841" y="2243455"/>
             <a:ext cx="134112" cy="100584"/>
           </a:xfrm>
           <a:prstGeom prst="line">
